--- a/index/designs/y9-l8/l7-radicals-city-map/l7-radicals-city-map.pptx
+++ b/index/designs/y9-l8/l7-radicals-city-map/l7-radicals-city-map.pptx
@@ -2115,15 +2115,6 @@
               </a:rPr>
               <a:t>部首</a:t>
             </a:r>
-            <a:pPr algn="ctr" indent="0" marL="0">
-              <a:lnSpc>
-                <a:spcPts val="9600"/>
-              </a:lnSpc>
-              <a:spcAft>
-                <a:spcPts val="1400"/>
-              </a:spcAft>
-              <a:buNone/>
-            </a:pPr>
             <a:r>
               <a:rPr lang="en-US" sz="9600" b="1" dirty="0">
                 <a:solidFill>
@@ -2135,15 +2126,6 @@
               </a:rPr>
               <a:t>·</a:t>
             </a:r>
-            <a:pPr algn="ctr" indent="0" marL="0">
-              <a:lnSpc>
-                <a:spcPts val="9600"/>
-              </a:lnSpc>
-              <a:spcAft>
-                <a:spcPts val="1400"/>
-              </a:spcAft>
-              <a:buNone/>
-            </a:pPr>
             <a:r>
               <a:rPr lang="en-US" sz="9600" dirty="0">
                 <a:solidFill>
@@ -6915,6 +6897,74 @@
               </a:rPr>
               <a:t>Describe (3 min):</a:t>
             </a:r>
+            <a:r>
+              <a:rPr lang="en-US" sz="950" dirty="0">
+                <a:solidFill>
+                  <a:srgbClr val="4E5C6E"/>
+                </a:solidFill>
+                <a:latin typeface="Noto Sans SC" pitchFamily="34" charset="0"/>
+                <a:ea typeface="Noto Sans SC" pitchFamily="34" charset="-122"/>
+                <a:cs typeface="Noto Sans SC" pitchFamily="34" charset="-120"/>
+              </a:rPr>
+              <a:t> teams describe the projected city map together using position words — 3–4 sentences</a:t>
+            </a:r>
+            <a:endParaRPr lang="en-US" sz="950" dirty="0"/>
+          </a:p>
+        </p:txBody>
+      </p:sp>
+      <p:sp>
+        <p:nvSpPr>
+          <p:cNvPr id="35" name="Text 33"/>
+          <p:cNvSpPr/>
+          <p:nvPr/>
+        </p:nvSpPr>
+        <p:spPr>
+          <a:xfrm>
+            <a:off x="7527727" y="2084338"/>
+            <a:ext cx="177701" cy="177701"/>
+          </a:xfrm>
+          <a:prstGeom prst="roundRect">
+            <a:avLst>
+              <a:gd name="adj" fmla="val 514572"/>
+            </a:avLst>
+          </a:prstGeom>
+          <a:solidFill>
+            <a:srgbClr val="C96A5C"/>
+          </a:solidFill>
+          <a:ln/>
+        </p:spPr>
+        <p:txBody>
+          <a:bodyPr wrap="square" rtlCol="0" anchor="ctr"/>
+          <a:lstStyle/>
+          <a:p>
+            <a:pPr indent="0" marL="0">
+              <a:buNone/>
+            </a:pPr>
+            <a:endParaRPr lang="en-US" dirty="0"/>
+          </a:p>
+        </p:txBody>
+      </p:sp>
+      <p:sp>
+        <p:nvSpPr>
+          <p:cNvPr id="36" name="Text 34"/>
+          <p:cNvSpPr/>
+          <p:nvPr/>
+        </p:nvSpPr>
+        <p:spPr>
+          <a:xfrm>
+            <a:off x="7578328" y="2091779"/>
+            <a:ext cx="78028" cy="162818"/>
+          </a:xfrm>
+          <a:prstGeom prst="rect">
+            <a:avLst/>
+          </a:prstGeom>
+          <a:noFill/>
+          <a:ln/>
+        </p:spPr>
+        <p:txBody>
+          <a:bodyPr wrap="square" lIns="0" tIns="0" rIns="0" bIns="0" rtlCol="0" anchor="t"/>
+          <a:lstStyle/>
+          <a:p>
             <a:pPr algn="l" indent="0" marL="0">
               <a:lnSpc>
                 <a:spcPts val="1283"/>
@@ -6922,6 +6972,59 @@
               <a:buNone/>
             </a:pPr>
             <a:r>
+              <a:rPr lang="en-US" sz="950" b="1" dirty="0">
+                <a:solidFill>
+                  <a:srgbClr val="4E5C6E"/>
+                </a:solidFill>
+                <a:latin typeface="Noto Sans SC" pitchFamily="34" charset="0"/>
+                <a:ea typeface="Noto Sans SC" pitchFamily="34" charset="-122"/>
+                <a:cs typeface="Noto Sans SC" pitchFamily="34" charset="-120"/>
+              </a:rPr>
+              <a:t>2</a:t>
+            </a:r>
+            <a:endParaRPr lang="en-US" sz="950" dirty="0"/>
+          </a:p>
+        </p:txBody>
+      </p:sp>
+      <p:sp>
+        <p:nvSpPr>
+          <p:cNvPr id="37" name="Text 35"/>
+          <p:cNvSpPr/>
+          <p:nvPr/>
+        </p:nvSpPr>
+        <p:spPr>
+          <a:xfrm>
+            <a:off x="7781627" y="2071688"/>
+            <a:ext cx="3815307" cy="325636"/>
+          </a:xfrm>
+          <a:prstGeom prst="rect">
+            <a:avLst/>
+          </a:prstGeom>
+          <a:noFill/>
+          <a:ln/>
+        </p:spPr>
+        <p:txBody>
+          <a:bodyPr wrap="square" lIns="0" tIns="0" rIns="0" bIns="0" rtlCol="0" anchor="t"/>
+          <a:lstStyle/>
+          <a:p>
+            <a:pPr algn="l" indent="0" marL="0">
+              <a:lnSpc>
+                <a:spcPts val="1283"/>
+              </a:lnSpc>
+              <a:buNone/>
+            </a:pPr>
+            <a:r>
+              <a:rPr lang="en-US" sz="950" b="1" dirty="0">
+                <a:solidFill>
+                  <a:srgbClr val="1A2535"/>
+                </a:solidFill>
+                <a:latin typeface="Noto Sans SC" pitchFamily="34" charset="0"/>
+                <a:ea typeface="Noto Sans SC" pitchFamily="34" charset="-122"/>
+                <a:cs typeface="Noto Sans SC" pitchFamily="34" charset="-120"/>
+              </a:rPr>
+              <a:t>Redesign (4 min):</a:t>
+            </a:r>
+            <a:r>
               <a:rPr lang="en-US" sz="950" dirty="0">
                 <a:solidFill>
                   <a:srgbClr val="4E5C6E"/>
@@ -6930,7 +7033,7 @@
                 <a:ea typeface="Noto Sans SC" pitchFamily="34" charset="-122"/>
                 <a:cs typeface="Noto Sans SC" pitchFamily="34" charset="-120"/>
               </a:rPr>
-              <a:t> teams describe the projected city map together using position words — 3–4 sentences</a:t>
+              <a:t> each team redesigns the city on a blank grid, moving buildings anywhere, then writes 3–4 sentences</a:t>
             </a:r>
             <a:endParaRPr lang="en-US" sz="950" dirty="0"/>
           </a:p>
@@ -6938,13 +7041,13 @@
       </p:sp>
       <p:sp>
         <p:nvSpPr>
-          <p:cNvPr id="35" name="Text 33"/>
-          <p:cNvSpPr/>
-          <p:nvPr/>
-        </p:nvSpPr>
-        <p:spPr>
-          <a:xfrm>
-            <a:off x="7527727" y="2084338"/>
+          <p:cNvPr id="38" name="Text 36"/>
+          <p:cNvSpPr/>
+          <p:nvPr/>
+        </p:nvSpPr>
+        <p:spPr>
+          <a:xfrm>
+            <a:off x="7527727" y="2460724"/>
             <a:ext cx="177701" cy="177701"/>
           </a:xfrm>
           <a:prstGeom prst="roundRect">
@@ -6970,14 +7073,14 @@
       </p:sp>
       <p:sp>
         <p:nvSpPr>
-          <p:cNvPr id="36" name="Text 34"/>
-          <p:cNvSpPr/>
-          <p:nvPr/>
-        </p:nvSpPr>
-        <p:spPr>
-          <a:xfrm>
-            <a:off x="7578328" y="2091779"/>
-            <a:ext cx="78028" cy="162818"/>
+          <p:cNvPr id="39" name="Text 37"/>
+          <p:cNvSpPr/>
+          <p:nvPr/>
+        </p:nvSpPr>
+        <p:spPr>
+          <a:xfrm>
+            <a:off x="7578030" y="2468166"/>
+            <a:ext cx="78635" cy="162818"/>
           </a:xfrm>
           <a:prstGeom prst="rect">
             <a:avLst/>
@@ -7004,7 +7107,7 @@
                 <a:ea typeface="Noto Sans SC" pitchFamily="34" charset="-122"/>
                 <a:cs typeface="Noto Sans SC" pitchFamily="34" charset="-120"/>
               </a:rPr>
-              <a:t>2</a:t>
+              <a:t>3</a:t>
             </a:r>
             <a:endParaRPr lang="en-US" sz="950" dirty="0"/>
           </a:p>
@@ -7012,13 +7115,13 @@
       </p:sp>
       <p:sp>
         <p:nvSpPr>
-          <p:cNvPr id="37" name="Text 35"/>
-          <p:cNvSpPr/>
-          <p:nvPr/>
-        </p:nvSpPr>
-        <p:spPr>
-          <a:xfrm>
-            <a:off x="7781627" y="2071688"/>
+          <p:cNvPr id="40" name="Text 38"/>
+          <p:cNvSpPr/>
+          <p:nvPr/>
+        </p:nvSpPr>
+        <p:spPr>
+          <a:xfrm>
+            <a:off x="7781627" y="2448074"/>
             <a:ext cx="3815307" cy="325636"/>
           </a:xfrm>
           <a:prstGeom prst="rect">
@@ -7046,147 +7149,8 @@
                 <a:ea typeface="Noto Sans SC" pitchFamily="34" charset="-122"/>
                 <a:cs typeface="Noto Sans SC" pitchFamily="34" charset="-120"/>
               </a:rPr>
-              <a:t>Redesign (4 min):</a:t>
-            </a:r>
-            <a:pPr algn="l" indent="0" marL="0">
-              <a:lnSpc>
-                <a:spcPts val="1283"/>
-              </a:lnSpc>
-              <a:buNone/>
-            </a:pPr>
-            <a:r>
-              <a:rPr lang="en-US" sz="950" dirty="0">
-                <a:solidFill>
-                  <a:srgbClr val="4E5C6E"/>
-                </a:solidFill>
-                <a:latin typeface="Noto Sans SC" pitchFamily="34" charset="0"/>
-                <a:ea typeface="Noto Sans SC" pitchFamily="34" charset="-122"/>
-                <a:cs typeface="Noto Sans SC" pitchFamily="34" charset="-120"/>
-              </a:rPr>
-              <a:t> each team redesigns the city on a blank grid, moving buildings anywhere, then writes 3–4 sentences</a:t>
-            </a:r>
-            <a:endParaRPr lang="en-US" sz="950" dirty="0"/>
-          </a:p>
-        </p:txBody>
-      </p:sp>
-      <p:sp>
-        <p:nvSpPr>
-          <p:cNvPr id="38" name="Text 36"/>
-          <p:cNvSpPr/>
-          <p:nvPr/>
-        </p:nvSpPr>
-        <p:spPr>
-          <a:xfrm>
-            <a:off x="7527727" y="2460724"/>
-            <a:ext cx="177701" cy="177701"/>
-          </a:xfrm>
-          <a:prstGeom prst="roundRect">
-            <a:avLst>
-              <a:gd name="adj" fmla="val 514572"/>
-            </a:avLst>
-          </a:prstGeom>
-          <a:solidFill>
-            <a:srgbClr val="C96A5C"/>
-          </a:solidFill>
-          <a:ln/>
-        </p:spPr>
-        <p:txBody>
-          <a:bodyPr wrap="square" rtlCol="0" anchor="ctr"/>
-          <a:lstStyle/>
-          <a:p>
-            <a:pPr indent="0" marL="0">
-              <a:buNone/>
-            </a:pPr>
-            <a:endParaRPr lang="en-US" dirty="0"/>
-          </a:p>
-        </p:txBody>
-      </p:sp>
-      <p:sp>
-        <p:nvSpPr>
-          <p:cNvPr id="39" name="Text 37"/>
-          <p:cNvSpPr/>
-          <p:nvPr/>
-        </p:nvSpPr>
-        <p:spPr>
-          <a:xfrm>
-            <a:off x="7578030" y="2468166"/>
-            <a:ext cx="78635" cy="162818"/>
-          </a:xfrm>
-          <a:prstGeom prst="rect">
-            <a:avLst/>
-          </a:prstGeom>
-          <a:noFill/>
-          <a:ln/>
-        </p:spPr>
-        <p:txBody>
-          <a:bodyPr wrap="square" lIns="0" tIns="0" rIns="0" bIns="0" rtlCol="0" anchor="t"/>
-          <a:lstStyle/>
-          <a:p>
-            <a:pPr algn="l" indent="0" marL="0">
-              <a:lnSpc>
-                <a:spcPts val="1283"/>
-              </a:lnSpc>
-              <a:buNone/>
-            </a:pPr>
-            <a:r>
-              <a:rPr lang="en-US" sz="950" b="1" dirty="0">
-                <a:solidFill>
-                  <a:srgbClr val="4E5C6E"/>
-                </a:solidFill>
-                <a:latin typeface="Noto Sans SC" pitchFamily="34" charset="0"/>
-                <a:ea typeface="Noto Sans SC" pitchFamily="34" charset="-122"/>
-                <a:cs typeface="Noto Sans SC" pitchFamily="34" charset="-120"/>
-              </a:rPr>
-              <a:t>3</a:t>
-            </a:r>
-            <a:endParaRPr lang="en-US" sz="950" dirty="0"/>
-          </a:p>
-        </p:txBody>
-      </p:sp>
-      <p:sp>
-        <p:nvSpPr>
-          <p:cNvPr id="40" name="Text 38"/>
-          <p:cNvSpPr/>
-          <p:nvPr/>
-        </p:nvSpPr>
-        <p:spPr>
-          <a:xfrm>
-            <a:off x="7781627" y="2448074"/>
-            <a:ext cx="3815307" cy="325636"/>
-          </a:xfrm>
-          <a:prstGeom prst="rect">
-            <a:avLst/>
-          </a:prstGeom>
-          <a:noFill/>
-          <a:ln/>
-        </p:spPr>
-        <p:txBody>
-          <a:bodyPr wrap="square" lIns="0" tIns="0" rIns="0" bIns="0" rtlCol="0" anchor="t"/>
-          <a:lstStyle/>
-          <a:p>
-            <a:pPr algn="l" indent="0" marL="0">
-              <a:lnSpc>
-                <a:spcPts val="1283"/>
-              </a:lnSpc>
-              <a:buNone/>
-            </a:pPr>
-            <a:r>
-              <a:rPr lang="en-US" sz="950" b="1" dirty="0">
-                <a:solidFill>
-                  <a:srgbClr val="1A2535"/>
-                </a:solidFill>
-                <a:latin typeface="Noto Sans SC" pitchFamily="34" charset="0"/>
-                <a:ea typeface="Noto Sans SC" pitchFamily="34" charset="-122"/>
-                <a:cs typeface="Noto Sans SC" pitchFamily="34" charset="-120"/>
-              </a:rPr>
               <a:t>Present (2 min):</a:t>
             </a:r>
-            <a:pPr algn="l" indent="0" marL="0">
-              <a:lnSpc>
-                <a:spcPts val="1283"/>
-              </a:lnSpc>
-              <a:buNone/>
-            </a:pPr>
             <a:r>
               <a:rPr lang="en-US" sz="950" dirty="0">
                 <a:solidFill>
@@ -7318,12 +7282,6 @@
               </a:rPr>
               <a:t>Sentence frame: </a:t>
             </a:r>
-            <a:pPr algn="l" indent="0" marL="0">
-              <a:lnSpc>
-                <a:spcPts val="1330"/>
-              </a:lnSpc>
-              <a:buNone/>
-            </a:pPr>
             <a:r>
               <a:rPr lang="en-US" sz="950" dirty="0">
                 <a:solidFill>
@@ -7881,12 +7839,6 @@
               </a:rPr>
               <a:t>Use at least </a:t>
             </a:r>
-            <a:pPr algn="l" indent="0" marL="0">
-              <a:lnSpc>
-                <a:spcPts val="1330"/>
-              </a:lnSpc>
-              <a:buNone/>
-            </a:pPr>
             <a:r>
               <a:rPr lang="en-US" sz="950" b="1" dirty="0">
                 <a:solidFill>
@@ -7898,12 +7850,6 @@
               </a:rPr>
               <a:t>five different position words</a:t>
             </a:r>
-            <a:pPr algn="l" indent="0" marL="0">
-              <a:lnSpc>
-                <a:spcPts val="1330"/>
-              </a:lnSpc>
-              <a:buNone/>
-            </a:pPr>
             <a:r>
               <a:rPr lang="en-US" sz="950" dirty="0">
                 <a:solidFill>
@@ -7915,12 +7861,6 @@
               </a:rPr>
               <a:t>, and justify one design choice: </a:t>
             </a:r>
-            <a:pPr algn="l" indent="0" marL="0">
-              <a:lnSpc>
-                <a:spcPts val="1330"/>
-              </a:lnSpc>
-              <a:buNone/>
-            </a:pPr>
             <a:r>
               <a:rPr lang="en-US" sz="950" dirty="0">
                 <a:solidFill>
@@ -8391,12 +8331,6 @@
               </a:rPr>
               <a:t>Hold up fingers: </a:t>
             </a:r>
-            <a:pPr algn="l" indent="0" marL="0">
-              <a:spcAft>
-                <a:spcPts val="1000"/>
-              </a:spcAft>
-              <a:buNone/>
-            </a:pPr>
             <a:r>
               <a:rPr lang="en-US" sz="1000" b="1" dirty="0">
                 <a:solidFill>
@@ -8408,12 +8342,6 @@
               </a:rPr>
               <a:t>3</a:t>
             </a:r>
-            <a:pPr algn="l" indent="0" marL="0">
-              <a:spcAft>
-                <a:spcPts val="1000"/>
-              </a:spcAft>
-              <a:buNone/>
-            </a:pPr>
             <a:r>
               <a:rPr lang="en-US" sz="1000" dirty="0">
                 <a:solidFill>
@@ -8425,12 +8353,6 @@
               </a:rPr>
               <a:t> = 完全可以 · </a:t>
             </a:r>
-            <a:pPr algn="l" indent="0" marL="0">
-              <a:spcAft>
-                <a:spcPts val="1000"/>
-              </a:spcAft>
-              <a:buNone/>
-            </a:pPr>
             <a:r>
               <a:rPr lang="en-US" sz="1000" b="1" dirty="0">
                 <a:solidFill>
@@ -8442,12 +8364,6 @@
               </a:rPr>
               <a:t>2</a:t>
             </a:r>
-            <a:pPr algn="l" indent="0" marL="0">
-              <a:spcAft>
-                <a:spcPts val="1000"/>
-              </a:spcAft>
-              <a:buNone/>
-            </a:pPr>
             <a:r>
               <a:rPr lang="en-US" sz="1000" dirty="0">
                 <a:solidFill>
@@ -8459,12 +8375,6 @@
               </a:rPr>
               <a:t> = 差不多 · </a:t>
             </a:r>
-            <a:pPr algn="l" indent="0" marL="0">
-              <a:spcAft>
-                <a:spcPts val="1000"/>
-              </a:spcAft>
-              <a:buNone/>
-            </a:pPr>
             <a:r>
               <a:rPr lang="en-US" sz="1000" b="1" dirty="0">
                 <a:solidFill>
@@ -8476,12 +8386,6 @@
               </a:rPr>
               <a:t>1</a:t>
             </a:r>
-            <a:pPr algn="l" indent="0" marL="0">
-              <a:spcAft>
-                <a:spcPts val="1000"/>
-              </a:spcAft>
-              <a:buNone/>
-            </a:pPr>
             <a:r>
               <a:rPr lang="en-US" sz="1000" dirty="0">
                 <a:solidFill>
@@ -8664,15 +8568,6 @@
               </a:rPr>
               <a:t>Teacher note:</a:t>
             </a:r>
-            <a:pPr algn="l" indent="0" marL="0">
-              <a:lnSpc>
-                <a:spcPts val="1330"/>
-              </a:lnSpc>
-              <a:spcBef>
-                <a:spcPts val="1000"/>
-              </a:spcBef>
-              <a:buNone/>
-            </a:pPr>
             <a:r>
               <a:rPr lang="en-US" sz="950" dirty="0">
                 <a:solidFill>
@@ -9463,12 +9358,26 @@
               </a:rPr>
               <a:t>“下一课是这个单元的总复习课，我们会准备好考3.2测验——设施、位置词、量词，全部复习一遍！”</a:t>
             </a:r>
+            <a:endParaRPr lang="en-US" sz="1300" dirty="0"/>
+          </a:p>
+          <a:p>
             <a:pPr algn="ctr" indent="0" marL="0">
               <a:lnSpc>
                 <a:spcPts val="1950"/>
               </a:lnSpc>
               <a:buNone/>
             </a:pPr>
+            <a:r>
+              <a:rPr lang="en-US" sz="1300" dirty="0">
+                <a:solidFill>
+                  <a:srgbClr val="4E5C6E"/>
+                </a:solidFill>
+                <a:latin typeface="Noto Sans SC" pitchFamily="34" charset="0"/>
+                <a:ea typeface="Noto Sans SC" pitchFamily="34" charset="-122"/>
+                <a:cs typeface="Noto Sans SC" pitchFamily="34" charset="-120"/>
+              </a:rPr>
+              <a:t>Next lesson: the unit's </a:t>
+            </a:r>
             <a:endParaRPr lang="en-US" sz="1300" dirty="0"/>
           </a:p>
           <a:p>
@@ -9479,26 +9388,6 @@
               <a:buNone/>
             </a:pPr>
             <a:r>
-              <a:rPr lang="en-US" sz="1300" dirty="0">
-                <a:solidFill>
-                  <a:srgbClr val="4E5C6E"/>
-                </a:solidFill>
-                <a:latin typeface="Noto Sans SC" pitchFamily="34" charset="0"/>
-                <a:ea typeface="Noto Sans SC" pitchFamily="34" charset="-122"/>
-                <a:cs typeface="Noto Sans SC" pitchFamily="34" charset="-120"/>
-              </a:rPr>
-              <a:t>Next lesson: the unit's </a:t>
-            </a:r>
-            <a:endParaRPr lang="en-US" sz="1300" dirty="0"/>
-          </a:p>
-          <a:p>
-            <a:pPr algn="ctr" indent="0" marL="0">
-              <a:lnSpc>
-                <a:spcPts val="1950"/>
-              </a:lnSpc>
-              <a:buNone/>
-            </a:pPr>
-            <a:r>
               <a:rPr lang="en-US" sz="1300" b="1" dirty="0">
                 <a:solidFill>
                   <a:srgbClr val="1A2535"/>
@@ -9509,12 +9398,6 @@
               </a:rPr>
               <a:t>final review lesson</a:t>
             </a:r>
-            <a:pPr algn="ctr" indent="0" marL="0">
-              <a:lnSpc>
-                <a:spcPts val="1950"/>
-              </a:lnSpc>
-              <a:buNone/>
-            </a:pPr>
             <a:r>
               <a:rPr lang="en-US" sz="1300" dirty="0">
                 <a:solidFill>
@@ -10877,12 +10760,6 @@
               </a:rPr>
               <a:t>Project one prompt at a time. Students </a:t>
             </a:r>
-            <a:pPr algn="l" indent="0" marL="0">
-              <a:lnSpc>
-                <a:spcPts val="1400"/>
-              </a:lnSpc>
-              <a:buNone/>
-            </a:pPr>
             <a:r>
               <a:rPr lang="en-US" sz="1000" b="1" dirty="0">
                 <a:solidFill>
@@ -10894,12 +10771,6 @@
               </a:rPr>
               <a:t>raise hands to answer</a:t>
             </a:r>
-            <a:pPr algn="l" indent="0" marL="0">
-              <a:lnSpc>
-                <a:spcPts val="1400"/>
-              </a:lnSpc>
-              <a:buNone/>
-            </a:pPr>
             <a:r>
               <a:rPr lang="en-US" sz="1000" dirty="0">
                 <a:solidFill>
@@ -10911,12 +10782,6 @@
               </a:rPr>
               <a:t> — first correct hand wins a point. Keep pace </a:t>
             </a:r>
-            <a:pPr algn="l" indent="0" marL="0">
-              <a:lnSpc>
-                <a:spcPts val="1400"/>
-              </a:lnSpc>
-              <a:buNone/>
-            </a:pPr>
             <a:r>
               <a:rPr lang="en-US" sz="1000" b="1" dirty="0">
                 <a:solidFill>
@@ -10928,12 +10793,6 @@
               </a:rPr>
               <a:t>fast</a:t>
             </a:r>
-            <a:pPr algn="l" indent="0" marL="0">
-              <a:lnSpc>
-                <a:spcPts val="1400"/>
-              </a:lnSpc>
-              <a:buNone/>
-            </a:pPr>
             <a:r>
               <a:rPr lang="en-US" sz="1000" dirty="0">
                 <a:solidFill>
@@ -11139,12 +10998,6 @@
               </a:rPr>
               <a:t>Project one facility sentence with a </a:t>
             </a:r>
-            <a:pPr algn="l" indent="0" marL="0">
-              <a:lnSpc>
-                <a:spcPts val="1540"/>
-              </a:lnSpc>
-              <a:buNone/>
-            </a:pPr>
             <a:r>
               <a:rPr lang="en-US" sz="1100" b="1" dirty="0">
                 <a:solidFill>
@@ -11156,12 +11009,6 @@
               </a:rPr>
               <a:t>blank</a:t>
             </a:r>
-            <a:pPr algn="l" indent="0" marL="0">
-              <a:lnSpc>
-                <a:spcPts val="1540"/>
-              </a:lnSpc>
-              <a:buNone/>
-            </a:pPr>
             <a:r>
               <a:rPr lang="en-US" sz="1100" dirty="0">
                 <a:solidFill>
@@ -11215,12 +11062,6 @@
               </a:rPr>
               <a:t>Cold call</a:t>
             </a:r>
-            <a:pPr algn="l" indent="0" marL="0">
-              <a:lnSpc>
-                <a:spcPts val="1400"/>
-              </a:lnSpc>
-              <a:buNone/>
-            </a:pPr>
             <a:r>
               <a:rPr lang="en-US" sz="1000" dirty="0">
                 <a:solidFill>
@@ -11232,12 +11073,6 @@
               </a:rPr>
               <a:t> one student to fill the blank; the whole class then </a:t>
             </a:r>
-            <a:pPr algn="l" indent="0" marL="0">
-              <a:lnSpc>
-                <a:spcPts val="1400"/>
-              </a:lnSpc>
-              <a:buNone/>
-            </a:pPr>
             <a:r>
               <a:rPr lang="en-US" sz="1000" b="1" dirty="0">
                 <a:solidFill>
@@ -11249,12 +11084,6 @@
               </a:rPr>
               <a:t>echoes</a:t>
             </a:r>
-            <a:pPr algn="l" indent="0" marL="0">
-              <a:lnSpc>
-                <a:spcPts val="1400"/>
-              </a:lnSpc>
-              <a:buNone/>
-            </a:pPr>
             <a:r>
               <a:rPr lang="en-US" sz="1000" dirty="0">
                 <a:solidFill>
@@ -11834,12 +11663,6 @@
               </a:rPr>
               <a:t>We are learning to </a:t>
             </a:r>
-            <a:pPr algn="l" indent="0" marL="0">
-              <a:lnSpc>
-                <a:spcPts val="2240"/>
-              </a:lnSpc>
-              <a:buNone/>
-            </a:pPr>
             <a:r>
               <a:rPr lang="en-US" sz="1600" b="1" dirty="0">
                 <a:solidFill>
@@ -11851,12 +11674,6 @@
               </a:rPr>
               <a:t>recall radicals under competition pressure</a:t>
             </a:r>
-            <a:pPr algn="l" indent="0" marL="0">
-              <a:lnSpc>
-                <a:spcPts val="2240"/>
-              </a:lnSpc>
-              <a:buNone/>
-            </a:pPr>
             <a:r>
               <a:rPr lang="en-US" sz="1600" dirty="0">
                 <a:solidFill>
@@ -11868,12 +11685,6 @@
               </a:rPr>
               <a:t> and use </a:t>
             </a:r>
-            <a:pPr algn="l" indent="0" marL="0">
-              <a:lnSpc>
-                <a:spcPts val="2240"/>
-              </a:lnSpc>
-              <a:buNone/>
-            </a:pPr>
             <a:r>
               <a:rPr lang="en-US" sz="1600" b="1" dirty="0">
                 <a:solidFill>
@@ -11885,12 +11696,6 @@
               </a:rPr>
               <a:t>position words</a:t>
             </a:r>
-            <a:pPr algn="l" indent="0" marL="0">
-              <a:lnSpc>
-                <a:spcPts val="2240"/>
-              </a:lnSpc>
-              <a:buNone/>
-            </a:pPr>
             <a:r>
               <a:rPr lang="en-US" sz="1600" dirty="0">
                 <a:solidFill>
@@ -12051,12 +11856,6 @@
               </a:rPr>
               <a:t>I can write at least </a:t>
             </a:r>
-            <a:pPr algn="l" indent="0" marL="0">
-              <a:lnSpc>
-                <a:spcPts val="1820"/>
-              </a:lnSpc>
-              <a:buNone/>
-            </a:pPr>
             <a:r>
               <a:rPr lang="en-US" sz="1300" b="1" dirty="0">
                 <a:solidFill>
@@ -12068,12 +11867,6 @@
               </a:rPr>
               <a:t>six radicals</a:t>
             </a:r>
-            <a:pPr algn="l" indent="0" marL="0">
-              <a:lnSpc>
-                <a:spcPts val="1820"/>
-              </a:lnSpc>
-              <a:buNone/>
-            </a:pPr>
             <a:r>
               <a:rPr lang="en-US" sz="1300" dirty="0">
                 <a:solidFill>
@@ -12276,12 +12069,6 @@
               </a:rPr>
               <a:t>I can describe a city map using </a:t>
             </a:r>
-            <a:pPr algn="l" indent="0" marL="0">
-              <a:lnSpc>
-                <a:spcPts val="1820"/>
-              </a:lnSpc>
-              <a:buNone/>
-            </a:pPr>
             <a:r>
               <a:rPr lang="en-US" sz="1300" b="1" dirty="0">
                 <a:solidFill>
@@ -12293,12 +12080,6 @@
               </a:rPr>
               <a:t>position words</a:t>
             </a:r>
-            <a:pPr algn="l" indent="0" marL="0">
-              <a:lnSpc>
-                <a:spcPts val="1820"/>
-              </a:lnSpc>
-              <a:buNone/>
-            </a:pPr>
             <a:r>
               <a:rPr lang="en-US" sz="1300" dirty="0">
                 <a:solidFill>
@@ -12501,12 +12282,6 @@
               </a:rPr>
               <a:t>I can recognise the </a:t>
             </a:r>
-            <a:pPr algn="l" indent="0" marL="0">
-              <a:lnSpc>
-                <a:spcPts val="1820"/>
-              </a:lnSpc>
-              <a:buNone/>
-            </a:pPr>
             <a:r>
               <a:rPr lang="en-US" sz="1300" b="1" dirty="0">
                 <a:solidFill>
@@ -12518,12 +12293,6 @@
               </a:rPr>
               <a:t>eight stationery preview words</a:t>
             </a:r>
-            <a:pPr algn="l" indent="0" marL="0">
-              <a:lnSpc>
-                <a:spcPts val="1820"/>
-              </a:lnSpc>
-              <a:buNone/>
-            </a:pPr>
             <a:r>
               <a:rPr lang="en-US" sz="1300" dirty="0">
                 <a:solidFill>
@@ -12991,9 +12760,6 @@
               </a:rPr>
               <a:t>“部首是汉字的基本部件，帮助我们猜字的意思。”</a:t>
             </a:r>
-            <a:pPr algn="l" indent="0" marL="0">
-              <a:buNone/>
-            </a:pPr>
             <a:r>
               <a:rPr lang="en-US" sz="1100" dirty="0">
                 <a:solidFill>
@@ -15294,12 +15060,6 @@
               </a:rPr>
               <a:t>“这些是文具的词——下一课我们会正式学。今天先认识一下。”</a:t>
             </a:r>
-            <a:pPr algn="l" indent="0" marL="0">
-              <a:spcAft>
-                <a:spcPts val="1200"/>
-              </a:spcAft>
-              <a:buNone/>
-            </a:pPr>
             <a:r>
               <a:rPr lang="en-US" sz="1100" dirty="0">
                 <a:solidFill>
@@ -17517,12 +17277,6 @@
               </a:rPr>
               <a:t>Teacher points to </a:t>
             </a:r>
-            <a:pPr algn="l" indent="0" marL="0">
-              <a:lnSpc>
-                <a:spcPts val="2320"/>
-              </a:lnSpc>
-              <a:buNone/>
-            </a:pPr>
             <a:r>
               <a:rPr lang="en-US" sz="1600" b="1" dirty="0">
                 <a:solidFill>
@@ -17534,12 +17288,6 @@
               </a:rPr>
               <a:t>氵</a:t>
             </a:r>
-            <a:pPr algn="l" indent="0" marL="0">
-              <a:lnSpc>
-                <a:spcPts val="2320"/>
-              </a:lnSpc>
-              <a:buNone/>
-            </a:pPr>
             <a:r>
               <a:rPr lang="en-US" sz="1100" dirty="0">
                 <a:solidFill>
@@ -17551,12 +17299,6 @@
               </a:rPr>
               <a:t>, </a:t>
             </a:r>
-            <a:pPr algn="l" indent="0" marL="0">
-              <a:lnSpc>
-                <a:spcPts val="2320"/>
-              </a:lnSpc>
-              <a:buNone/>
-            </a:pPr>
             <a:r>
               <a:rPr lang="en-US" sz="1600" b="1" dirty="0">
                 <a:solidFill>
@@ -17568,12 +17310,6 @@
               </a:rPr>
               <a:t>木</a:t>
             </a:r>
-            <a:pPr algn="l" indent="0" marL="0">
-              <a:lnSpc>
-                <a:spcPts val="2320"/>
-              </a:lnSpc>
-              <a:buNone/>
-            </a:pPr>
             <a:r>
               <a:rPr lang="en-US" sz="1100" dirty="0">
                 <a:solidFill>
@@ -17585,12 +17321,6 @@
               </a:rPr>
               <a:t>, and </a:t>
             </a:r>
-            <a:pPr algn="l" indent="0" marL="0">
-              <a:lnSpc>
-                <a:spcPts val="2320"/>
-              </a:lnSpc>
-              <a:buNone/>
-            </a:pPr>
             <a:r>
               <a:rPr lang="en-US" sz="1600" b="1" dirty="0">
                 <a:solidFill>
@@ -17602,12 +17332,6 @@
               </a:rPr>
               <a:t>宀</a:t>
             </a:r>
-            <a:pPr algn="l" indent="0" marL="0">
-              <a:lnSpc>
-                <a:spcPts val="2320"/>
-              </a:lnSpc>
-              <a:buNone/>
-            </a:pPr>
             <a:r>
               <a:rPr lang="en-US" sz="1100" dirty="0">
                 <a:solidFill>
@@ -17619,12 +17343,6 @@
               </a:rPr>
               <a:t> on the projector. Class calls out </a:t>
             </a:r>
-            <a:pPr algn="l" indent="0" marL="0">
-              <a:lnSpc>
-                <a:spcPts val="2320"/>
-              </a:lnSpc>
-              <a:buNone/>
-            </a:pPr>
             <a:r>
               <a:rPr lang="en-US" sz="1100" b="1" dirty="0">
                 <a:solidFill>
@@ -17636,12 +17354,6 @@
               </a:rPr>
               <a:t>one example word</a:t>
             </a:r>
-            <a:pPr algn="l" indent="0" marL="0">
-              <a:lnSpc>
-                <a:spcPts val="2320"/>
-              </a:lnSpc>
-              <a:buNone/>
-            </a:pPr>
             <a:r>
               <a:rPr lang="en-US" sz="1100" dirty="0">
                 <a:solidFill>
@@ -17953,12 +17665,6 @@
               </a:rPr>
               <a:t>Teacher asks: </a:t>
             </a:r>
-            <a:pPr algn="l" indent="0" marL="0">
-              <a:lnSpc>
-                <a:spcPts val="1595"/>
-              </a:lnSpc>
-              <a:buNone/>
-            </a:pPr>
             <a:r>
               <a:rPr lang="en-US" sz="1100" i="1" dirty="0">
                 <a:solidFill>
@@ -18270,12 +17976,6 @@
               </a:rPr>
               <a:t>Teacher projects </a:t>
             </a:r>
-            <a:pPr algn="l" indent="0" marL="0">
-              <a:lnSpc>
-                <a:spcPts val="2320"/>
-              </a:lnSpc>
-              <a:buNone/>
-            </a:pPr>
             <a:r>
               <a:rPr lang="en-US" sz="1600" b="1" dirty="0">
                 <a:solidFill>
@@ -18287,12 +17987,6 @@
               </a:rPr>
               <a:t>游泳池</a:t>
             </a:r>
-            <a:pPr algn="l" indent="0" marL="0">
-              <a:lnSpc>
-                <a:spcPts val="2320"/>
-              </a:lnSpc>
-              <a:buNone/>
-            </a:pPr>
             <a:r>
               <a:rPr lang="en-US" sz="1100" dirty="0">
                 <a:solidFill>
@@ -18304,12 +17998,6 @@
               </a:rPr>
               <a:t> and </a:t>
             </a:r>
-            <a:pPr algn="l" indent="0" marL="0">
-              <a:lnSpc>
-                <a:spcPts val="2320"/>
-              </a:lnSpc>
-              <a:buNone/>
-            </a:pPr>
             <a:r>
               <a:rPr lang="en-US" sz="1600" b="1" dirty="0">
                 <a:solidFill>
@@ -18321,12 +18009,6 @@
               </a:rPr>
               <a:t>游泳馆</a:t>
             </a:r>
-            <a:pPr algn="l" indent="0" marL="0">
-              <a:lnSpc>
-                <a:spcPts val="2320"/>
-              </a:lnSpc>
-              <a:buNone/>
-            </a:pPr>
             <a:r>
               <a:rPr lang="en-US" sz="1100" dirty="0">
                 <a:solidFill>
@@ -18338,12 +18020,6 @@
               </a:rPr>
               <a:t>. </a:t>
             </a:r>
-            <a:pPr algn="l" indent="0" marL="0">
-              <a:lnSpc>
-                <a:spcPts val="2320"/>
-              </a:lnSpc>
-              <a:buNone/>
-            </a:pPr>
             <a:r>
               <a:rPr lang="en-US" sz="1100" i="1" dirty="0">
                 <a:solidFill>
@@ -18991,6 +18667,53 @@
               </a:rPr>
               <a:t>✅ 氵 → </a:t>
             </a:r>
+            <a:r>
+              <a:rPr lang="en-US" sz="1500" b="1" dirty="0">
+                <a:solidFill>
+                  <a:srgbClr val="B87A30"/>
+                </a:solidFill>
+                <a:latin typeface="Noto Serif SC" pitchFamily="34" charset="0"/>
+                <a:ea typeface="Noto Serif SC" pitchFamily="34" charset="-122"/>
+                <a:cs typeface="Noto Serif SC" pitchFamily="34" charset="-120"/>
+              </a:rPr>
+              <a:t>游泳池</a:t>
+            </a:r>
+            <a:r>
+              <a:rPr lang="en-US" sz="1500" dirty="0">
+                <a:solidFill>
+                  <a:srgbClr val="1A2535"/>
+                </a:solidFill>
+                <a:latin typeface="Noto Serif SC" pitchFamily="34" charset="0"/>
+                <a:ea typeface="Noto Serif SC" pitchFamily="34" charset="-122"/>
+                <a:cs typeface="Noto Serif SC" pitchFamily="34" charset="-120"/>
+              </a:rPr>
+              <a:t> / 汉语</a:t>
+            </a:r>
+            <a:endParaRPr lang="en-US" sz="1500" dirty="0"/>
+          </a:p>
+        </p:txBody>
+      </p:sp>
+      <p:sp>
+        <p:nvSpPr>
+          <p:cNvPr id="15" name="Text 13"/>
+          <p:cNvSpPr/>
+          <p:nvPr/>
+        </p:nvSpPr>
+        <p:spPr>
+          <a:xfrm>
+            <a:off x="889159" y="2653754"/>
+            <a:ext cx="2878217" cy="266700"/>
+          </a:xfrm>
+          <a:prstGeom prst="rect">
+            <a:avLst/>
+          </a:prstGeom>
+          <a:noFill/>
+          <a:ln/>
+        </p:spPr>
+        <p:txBody>
+          <a:bodyPr wrap="square" lIns="0" tIns="0" rIns="0" bIns="0" rtlCol="0" anchor="t"/>
+          <a:lstStyle/>
+          <a:p>
             <a:pPr algn="ctr" indent="0" marL="0">
               <a:spcAft>
                 <a:spcPts val="400"/>
@@ -18998,16 +18721,63 @@
               <a:buNone/>
             </a:pPr>
             <a:r>
-              <a:rPr lang="en-US" sz="1500" b="1" dirty="0">
-                <a:solidFill>
-                  <a:srgbClr val="B87A30"/>
+              <a:rPr lang="en-US" sz="1500" dirty="0">
+                <a:solidFill>
+                  <a:srgbClr val="1A2535"/>
                 </a:solidFill>
                 <a:latin typeface="Noto Serif SC" pitchFamily="34" charset="0"/>
                 <a:ea typeface="Noto Serif SC" pitchFamily="34" charset="-122"/>
                 <a:cs typeface="Noto Serif SC" pitchFamily="34" charset="-120"/>
               </a:rPr>
-              <a:t>游泳池</a:t>
-            </a:r>
+              <a:t>木 → </a:t>
+            </a:r>
+            <a:r>
+              <a:rPr lang="en-US" sz="1500" b="1" dirty="0">
+                <a:solidFill>
+                  <a:srgbClr val="B87A30"/>
+                </a:solidFill>
+                <a:latin typeface="Noto Serif SC" pitchFamily="34" charset="0"/>
+                <a:ea typeface="Noto Serif SC" pitchFamily="34" charset="-122"/>
+                <a:cs typeface="Noto Serif SC" pitchFamily="34" charset="-120"/>
+              </a:rPr>
+              <a:t>校</a:t>
+            </a:r>
+            <a:r>
+              <a:rPr lang="en-US" sz="1500" dirty="0">
+                <a:solidFill>
+                  <a:srgbClr val="1A2535"/>
+                </a:solidFill>
+                <a:latin typeface="Noto Serif SC" pitchFamily="34" charset="0"/>
+                <a:ea typeface="Noto Serif SC" pitchFamily="34" charset="-122"/>
+                <a:cs typeface="Noto Serif SC" pitchFamily="34" charset="-120"/>
+              </a:rPr>
+              <a:t> / 楼</a:t>
+            </a:r>
+            <a:endParaRPr lang="en-US" sz="1500" dirty="0"/>
+          </a:p>
+        </p:txBody>
+      </p:sp>
+      <p:sp>
+        <p:nvSpPr>
+          <p:cNvPr id="16" name="Text 14"/>
+          <p:cNvSpPr/>
+          <p:nvPr/>
+        </p:nvSpPr>
+        <p:spPr>
+          <a:xfrm>
+            <a:off x="889159" y="2971205"/>
+            <a:ext cx="2878217" cy="266700"/>
+          </a:xfrm>
+          <a:prstGeom prst="rect">
+            <a:avLst/>
+          </a:prstGeom>
+          <a:noFill/>
+          <a:ln/>
+        </p:spPr>
+        <p:txBody>
+          <a:bodyPr wrap="square" lIns="0" tIns="0" rIns="0" bIns="0" rtlCol="0" anchor="t"/>
+          <a:lstStyle/>
+          <a:p>
             <a:pPr algn="ctr" indent="0" marL="0">
               <a:spcAft>
                 <a:spcPts val="400"/>
@@ -19023,149 +18793,19 @@
                 <a:ea typeface="Noto Serif SC" pitchFamily="34" charset="-122"/>
                 <a:cs typeface="Noto Serif SC" pitchFamily="34" charset="-120"/>
               </a:rPr>
-              <a:t> / 汉语</a:t>
-            </a:r>
-            <a:endParaRPr lang="en-US" sz="1500" dirty="0"/>
-          </a:p>
-        </p:txBody>
-      </p:sp>
-      <p:sp>
-        <p:nvSpPr>
-          <p:cNvPr id="15" name="Text 13"/>
-          <p:cNvSpPr/>
-          <p:nvPr/>
-        </p:nvSpPr>
-        <p:spPr>
-          <a:xfrm>
-            <a:off x="889159" y="2653754"/>
-            <a:ext cx="2878217" cy="266700"/>
-          </a:xfrm>
-          <a:prstGeom prst="rect">
-            <a:avLst/>
-          </a:prstGeom>
-          <a:noFill/>
-          <a:ln/>
-        </p:spPr>
-        <p:txBody>
-          <a:bodyPr wrap="square" lIns="0" tIns="0" rIns="0" bIns="0" rtlCol="0" anchor="t"/>
-          <a:lstStyle/>
-          <a:p>
-            <a:pPr algn="ctr" indent="0" marL="0">
-              <a:spcAft>
-                <a:spcPts val="400"/>
-              </a:spcAft>
-              <a:buNone/>
-            </a:pPr>
-            <a:r>
-              <a:rPr lang="en-US" sz="1500" dirty="0">
-                <a:solidFill>
-                  <a:srgbClr val="1A2535"/>
+              <a:t>宀 → </a:t>
+            </a:r>
+            <a:r>
+              <a:rPr lang="en-US" sz="1500" b="1" dirty="0">
+                <a:solidFill>
+                  <a:srgbClr val="B87A30"/>
                 </a:solidFill>
                 <a:latin typeface="Noto Serif SC" pitchFamily="34" charset="0"/>
                 <a:ea typeface="Noto Serif SC" pitchFamily="34" charset="-122"/>
                 <a:cs typeface="Noto Serif SC" pitchFamily="34" charset="-120"/>
               </a:rPr>
-              <a:t>木 → </a:t>
-            </a:r>
-            <a:pPr algn="ctr" indent="0" marL="0">
-              <a:spcAft>
-                <a:spcPts val="400"/>
-              </a:spcAft>
-              <a:buNone/>
-            </a:pPr>
-            <a:r>
-              <a:rPr lang="en-US" sz="1500" b="1" dirty="0">
-                <a:solidFill>
-                  <a:srgbClr val="B87A30"/>
-                </a:solidFill>
-                <a:latin typeface="Noto Serif SC" pitchFamily="34" charset="0"/>
-                <a:ea typeface="Noto Serif SC" pitchFamily="34" charset="-122"/>
-                <a:cs typeface="Noto Serif SC" pitchFamily="34" charset="-120"/>
-              </a:rPr>
-              <a:t>校</a:t>
-            </a:r>
-            <a:pPr algn="ctr" indent="0" marL="0">
-              <a:spcAft>
-                <a:spcPts val="400"/>
-              </a:spcAft>
-              <a:buNone/>
-            </a:pPr>
-            <a:r>
-              <a:rPr lang="en-US" sz="1500" dirty="0">
-                <a:solidFill>
-                  <a:srgbClr val="1A2535"/>
-                </a:solidFill>
-                <a:latin typeface="Noto Serif SC" pitchFamily="34" charset="0"/>
-                <a:ea typeface="Noto Serif SC" pitchFamily="34" charset="-122"/>
-                <a:cs typeface="Noto Serif SC" pitchFamily="34" charset="-120"/>
-              </a:rPr>
-              <a:t> / 楼</a:t>
-            </a:r>
-            <a:endParaRPr lang="en-US" sz="1500" dirty="0"/>
-          </a:p>
-        </p:txBody>
-      </p:sp>
-      <p:sp>
-        <p:nvSpPr>
-          <p:cNvPr id="16" name="Text 14"/>
-          <p:cNvSpPr/>
-          <p:nvPr/>
-        </p:nvSpPr>
-        <p:spPr>
-          <a:xfrm>
-            <a:off x="889159" y="2971205"/>
-            <a:ext cx="2878217" cy="266700"/>
-          </a:xfrm>
-          <a:prstGeom prst="rect">
-            <a:avLst/>
-          </a:prstGeom>
-          <a:noFill/>
-          <a:ln/>
-        </p:spPr>
-        <p:txBody>
-          <a:bodyPr wrap="square" lIns="0" tIns="0" rIns="0" bIns="0" rtlCol="0" anchor="t"/>
-          <a:lstStyle/>
-          <a:p>
-            <a:pPr algn="ctr" indent="0" marL="0">
-              <a:spcAft>
-                <a:spcPts val="400"/>
-              </a:spcAft>
-              <a:buNone/>
-            </a:pPr>
-            <a:r>
-              <a:rPr lang="en-US" sz="1500" dirty="0">
-                <a:solidFill>
-                  <a:srgbClr val="1A2535"/>
-                </a:solidFill>
-                <a:latin typeface="Noto Serif SC" pitchFamily="34" charset="0"/>
-                <a:ea typeface="Noto Serif SC" pitchFamily="34" charset="-122"/>
-                <a:cs typeface="Noto Serif SC" pitchFamily="34" charset="-120"/>
-              </a:rPr>
-              <a:t>宀 → </a:t>
-            </a:r>
-            <a:pPr algn="ctr" indent="0" marL="0">
-              <a:spcAft>
-                <a:spcPts val="400"/>
-              </a:spcAft>
-              <a:buNone/>
-            </a:pPr>
-            <a:r>
-              <a:rPr lang="en-US" sz="1500" b="1" dirty="0">
-                <a:solidFill>
-                  <a:srgbClr val="B87A30"/>
-                </a:solidFill>
-                <a:latin typeface="Noto Serif SC" pitchFamily="34" charset="0"/>
-                <a:ea typeface="Noto Serif SC" pitchFamily="34" charset="-122"/>
-                <a:cs typeface="Noto Serif SC" pitchFamily="34" charset="-120"/>
-              </a:rPr>
               <a:t>室</a:t>
             </a:r>
-            <a:pPr algn="ctr" indent="0" marL="0">
-              <a:spcAft>
-                <a:spcPts val="400"/>
-              </a:spcAft>
-              <a:buNone/>
-            </a:pPr>
             <a:r>
               <a:rPr lang="en-US" sz="1500" dirty="0">
                 <a:solidFill>
@@ -19401,12 +19041,6 @@
               </a:rPr>
               <a:t>✅ </a:t>
             </a:r>
-            <a:pPr algn="ctr" indent="0" marL="0">
-              <a:spcAft>
-                <a:spcPts val="400"/>
-              </a:spcAft>
-              <a:buNone/>
-            </a:pPr>
             <a:r>
               <a:rPr lang="en-US" sz="1500" b="1" dirty="0">
                 <a:solidFill>
@@ -19681,12 +19315,6 @@
               </a:rPr>
               <a:t>✅ </a:t>
             </a:r>
-            <a:pPr algn="ctr" indent="0" marL="0">
-              <a:spcAft>
-                <a:spcPts val="400"/>
-              </a:spcAft>
-              <a:buNone/>
-            </a:pPr>
             <a:r>
               <a:rPr lang="en-US" sz="1500" b="1" dirty="0">
                 <a:solidFill>
@@ -21018,12 +20646,6 @@
               </a:rPr>
               <a:t>Project the reference grid for </a:t>
             </a:r>
-            <a:pPr algn="l" indent="0" marL="0">
-              <a:lnSpc>
-                <a:spcPts val="1330"/>
-              </a:lnSpc>
-              <a:buNone/>
-            </a:pPr>
             <a:r>
               <a:rPr lang="en-US" sz="950" b="1" dirty="0">
                 <a:solidFill>
@@ -21035,12 +20657,6 @@
               </a:rPr>
               <a:t>1 minute of final study</a:t>
             </a:r>
-            <a:pPr algn="l" indent="0" marL="0">
-              <a:lnSpc>
-                <a:spcPts val="1330"/>
-              </a:lnSpc>
-              <a:buNone/>
-            </a:pPr>
             <a:r>
               <a:rPr lang="en-US" sz="950" dirty="0">
                 <a:solidFill>
@@ -21246,6 +20862,85 @@
               </a:rPr>
               <a:t>3–4 teams; one </a:t>
             </a:r>
+            <a:r>
+              <a:rPr lang="en-US" sz="950" b="1" dirty="0">
+                <a:solidFill>
+                  <a:srgbClr val="1A2535"/>
+                </a:solidFill>
+                <a:latin typeface="Noto Sans SC" pitchFamily="34" charset="0"/>
+                <a:ea typeface="Noto Sans SC" pitchFamily="34" charset="-122"/>
+                <a:cs typeface="Noto Sans SC" pitchFamily="34" charset="-120"/>
+              </a:rPr>
+              <a:t>scribe</a:t>
+            </a:r>
+            <a:r>
+              <a:rPr lang="en-US" sz="950" dirty="0">
+                <a:solidFill>
+                  <a:srgbClr val="4E5C6E"/>
+                </a:solidFill>
+                <a:latin typeface="Noto Sans SC" pitchFamily="34" charset="0"/>
+                <a:ea typeface="Noto Sans SC" pitchFamily="34" charset="-122"/>
+                <a:cs typeface="Noto Sans SC" pitchFamily="34" charset="-120"/>
+              </a:rPr>
+              <a:t> writes for the team (or each member writes and the team's best set counts)</a:t>
+            </a:r>
+            <a:endParaRPr lang="en-US" sz="950" dirty="0"/>
+          </a:p>
+        </p:txBody>
+      </p:sp>
+      <p:sp>
+        <p:nvSpPr>
+          <p:cNvPr id="39" name="Text 37"/>
+          <p:cNvSpPr/>
+          <p:nvPr/>
+        </p:nvSpPr>
+        <p:spPr>
+          <a:xfrm>
+            <a:off x="8035677" y="2093863"/>
+            <a:ext cx="177701" cy="177701"/>
+          </a:xfrm>
+          <a:prstGeom prst="roundRect">
+            <a:avLst>
+              <a:gd name="adj" fmla="val 514572"/>
+            </a:avLst>
+          </a:prstGeom>
+          <a:solidFill>
+            <a:srgbClr val="C96A5C"/>
+          </a:solidFill>
+          <a:ln/>
+        </p:spPr>
+        <p:txBody>
+          <a:bodyPr wrap="square" rtlCol="0" anchor="ctr"/>
+          <a:lstStyle/>
+          <a:p>
+            <a:pPr indent="0" marL="0">
+              <a:buNone/>
+            </a:pPr>
+            <a:endParaRPr lang="en-US" dirty="0"/>
+          </a:p>
+        </p:txBody>
+      </p:sp>
+      <p:sp>
+        <p:nvSpPr>
+          <p:cNvPr id="40" name="Text 38"/>
+          <p:cNvSpPr/>
+          <p:nvPr/>
+        </p:nvSpPr>
+        <p:spPr>
+          <a:xfrm>
+            <a:off x="8086279" y="2101304"/>
+            <a:ext cx="78028" cy="162818"/>
+          </a:xfrm>
+          <a:prstGeom prst="rect">
+            <a:avLst/>
+          </a:prstGeom>
+          <a:noFill/>
+          <a:ln/>
+        </p:spPr>
+        <p:txBody>
+          <a:bodyPr wrap="square" lIns="0" tIns="0" rIns="0" bIns="0" rtlCol="0" anchor="t"/>
+          <a:lstStyle/>
+          <a:p>
             <a:pPr algn="l" indent="0" marL="0">
               <a:lnSpc>
                 <a:spcPts val="1283"/>
@@ -21255,14 +20950,39 @@
             <a:r>
               <a:rPr lang="en-US" sz="950" b="1" dirty="0">
                 <a:solidFill>
-                  <a:srgbClr val="1A2535"/>
-                </a:solidFill>
-                <a:latin typeface="Noto Sans SC" pitchFamily="34" charset="0"/>
-                <a:ea typeface="Noto Sans SC" pitchFamily="34" charset="-122"/>
-                <a:cs typeface="Noto Sans SC" pitchFamily="34" charset="-120"/>
-              </a:rPr>
-              <a:t>scribe</a:t>
-            </a:r>
+                  <a:srgbClr val="4E5C6E"/>
+                </a:solidFill>
+                <a:latin typeface="Noto Sans SC" pitchFamily="34" charset="0"/>
+                <a:ea typeface="Noto Sans SC" pitchFamily="34" charset="-122"/>
+                <a:cs typeface="Noto Sans SC" pitchFamily="34" charset="-120"/>
+              </a:rPr>
+              <a:t>2</a:t>
+            </a:r>
+            <a:endParaRPr lang="en-US" sz="950" dirty="0"/>
+          </a:p>
+        </p:txBody>
+      </p:sp>
+      <p:sp>
+        <p:nvSpPr>
+          <p:cNvPr id="41" name="Text 39"/>
+          <p:cNvSpPr/>
+          <p:nvPr/>
+        </p:nvSpPr>
+        <p:spPr>
+          <a:xfrm>
+            <a:off x="8289578" y="2081212"/>
+            <a:ext cx="1860063" cy="162818"/>
+          </a:xfrm>
+          <a:prstGeom prst="rect">
+            <a:avLst/>
+          </a:prstGeom>
+          <a:noFill/>
+          <a:ln/>
+        </p:spPr>
+        <p:txBody>
+          <a:bodyPr wrap="square" lIns="0" tIns="0" rIns="0" bIns="0" rtlCol="0" anchor="t"/>
+          <a:lstStyle/>
+          <a:p>
             <a:pPr algn="l" indent="0" marL="0">
               <a:lnSpc>
                 <a:spcPts val="1283"/>
@@ -21278,7 +20998,29 @@
                 <a:ea typeface="Noto Sans SC" pitchFamily="34" charset="-122"/>
                 <a:cs typeface="Noto Sans SC" pitchFamily="34" charset="-120"/>
               </a:rPr>
-              <a:t> writes for the team (or each member writes and the team's best set counts)</a:t>
+              <a:t>Study grid </a:t>
+            </a:r>
+            <a:r>
+              <a:rPr lang="en-US" sz="950" b="1" dirty="0">
+                <a:solidFill>
+                  <a:srgbClr val="1A2535"/>
+                </a:solidFill>
+                <a:latin typeface="Noto Sans SC" pitchFamily="34" charset="0"/>
+                <a:ea typeface="Noto Sans SC" pitchFamily="34" charset="-122"/>
+                <a:cs typeface="Noto Sans SC" pitchFamily="34" charset="-120"/>
+              </a:rPr>
+              <a:t>1 min</a:t>
+            </a:r>
+            <a:r>
+              <a:rPr lang="en-US" sz="950" dirty="0">
+                <a:solidFill>
+                  <a:srgbClr val="4E5C6E"/>
+                </a:solidFill>
+                <a:latin typeface="Noto Sans SC" pitchFamily="34" charset="0"/>
+                <a:ea typeface="Noto Sans SC" pitchFamily="34" charset="-122"/>
+                <a:cs typeface="Noto Sans SC" pitchFamily="34" charset="-120"/>
+              </a:rPr>
+              <a:t> → grid hidden</a:t>
             </a:r>
             <a:endParaRPr lang="en-US" sz="950" dirty="0"/>
           </a:p>
@@ -21286,13 +21028,13 @@
       </p:sp>
       <p:sp>
         <p:nvSpPr>
-          <p:cNvPr id="39" name="Text 37"/>
-          <p:cNvSpPr/>
-          <p:nvPr/>
-        </p:nvSpPr>
-        <p:spPr>
-          <a:xfrm>
-            <a:off x="8035677" y="2093863"/>
+          <p:cNvPr id="42" name="Text 40"/>
+          <p:cNvSpPr/>
+          <p:nvPr/>
+        </p:nvSpPr>
+        <p:spPr>
+          <a:xfrm>
+            <a:off x="8035677" y="2334964"/>
             <a:ext cx="177701" cy="177701"/>
           </a:xfrm>
           <a:prstGeom prst="roundRect">
@@ -21318,14 +21060,14 @@
       </p:sp>
       <p:sp>
         <p:nvSpPr>
-          <p:cNvPr id="40" name="Text 38"/>
-          <p:cNvSpPr/>
-          <p:nvPr/>
-        </p:nvSpPr>
-        <p:spPr>
-          <a:xfrm>
-            <a:off x="8086279" y="2101304"/>
-            <a:ext cx="78028" cy="162818"/>
+          <p:cNvPr id="43" name="Text 41"/>
+          <p:cNvSpPr/>
+          <p:nvPr/>
+        </p:nvSpPr>
+        <p:spPr>
+          <a:xfrm>
+            <a:off x="8085981" y="2342406"/>
+            <a:ext cx="78635" cy="162818"/>
           </a:xfrm>
           <a:prstGeom prst="rect">
             <a:avLst/>
@@ -21352,7 +21094,7 @@
                 <a:ea typeface="Noto Sans SC" pitchFamily="34" charset="-122"/>
                 <a:cs typeface="Noto Sans SC" pitchFamily="34" charset="-120"/>
               </a:rPr>
-              <a:t>2</a:t>
+              <a:t>3</a:t>
             </a:r>
             <a:endParaRPr lang="en-US" sz="950" dirty="0"/>
           </a:p>
@@ -21360,14 +21102,14 @@
       </p:sp>
       <p:sp>
         <p:nvSpPr>
-          <p:cNvPr id="41" name="Text 39"/>
-          <p:cNvSpPr/>
-          <p:nvPr/>
-        </p:nvSpPr>
-        <p:spPr>
-          <a:xfrm>
-            <a:off x="8289578" y="2081212"/>
-            <a:ext cx="1860063" cy="162818"/>
+          <p:cNvPr id="44" name="Text 42"/>
+          <p:cNvSpPr/>
+          <p:nvPr/>
+        </p:nvSpPr>
+        <p:spPr>
+          <a:xfrm>
+            <a:off x="8289578" y="2322314"/>
+            <a:ext cx="3297198" cy="325636"/>
           </a:xfrm>
           <a:prstGeom prst="rect">
             <a:avLst/>
@@ -21386,6 +21128,17 @@
               <a:buNone/>
             </a:pPr>
             <a:r>
+              <a:rPr lang="en-US" sz="950" b="1" dirty="0">
+                <a:solidFill>
+                  <a:srgbClr val="1A2535"/>
+                </a:solidFill>
+                <a:latin typeface="Noto Sans SC" pitchFamily="34" charset="0"/>
+                <a:ea typeface="Noto Sans SC" pitchFamily="34" charset="-122"/>
+                <a:cs typeface="Noto Sans SC" pitchFamily="34" charset="-120"/>
+              </a:rPr>
+              <a:t>3 min</a:t>
+            </a:r>
+            <a:r>
               <a:rPr lang="en-US" sz="950" dirty="0">
                 <a:solidFill>
                   <a:srgbClr val="4E5C6E"/>
@@ -21394,8 +21147,65 @@
                 <a:ea typeface="Noto Sans SC" pitchFamily="34" charset="-122"/>
                 <a:cs typeface="Noto Sans SC" pitchFamily="34" charset="-120"/>
               </a:rPr>
-              <a:t>Study grid </a:t>
-            </a:r>
+              <a:t>: write as many radicals as remembered, each with one example word</a:t>
+            </a:r>
+            <a:endParaRPr lang="en-US" sz="950" dirty="0"/>
+          </a:p>
+        </p:txBody>
+      </p:sp>
+      <p:sp>
+        <p:nvSpPr>
+          <p:cNvPr id="45" name="Text 43"/>
+          <p:cNvSpPr/>
+          <p:nvPr/>
+        </p:nvSpPr>
+        <p:spPr>
+          <a:xfrm>
+            <a:off x="8035677" y="2711351"/>
+            <a:ext cx="177701" cy="177701"/>
+          </a:xfrm>
+          <a:prstGeom prst="roundRect">
+            <a:avLst>
+              <a:gd name="adj" fmla="val 514572"/>
+            </a:avLst>
+          </a:prstGeom>
+          <a:solidFill>
+            <a:srgbClr val="C96A5C"/>
+          </a:solidFill>
+          <a:ln/>
+        </p:spPr>
+        <p:txBody>
+          <a:bodyPr wrap="square" rtlCol="0" anchor="ctr"/>
+          <a:lstStyle/>
+          <a:p>
+            <a:pPr indent="0" marL="0">
+              <a:buNone/>
+            </a:pPr>
+            <a:endParaRPr lang="en-US" dirty="0"/>
+          </a:p>
+        </p:txBody>
+      </p:sp>
+      <p:sp>
+        <p:nvSpPr>
+          <p:cNvPr id="46" name="Text 44"/>
+          <p:cNvSpPr/>
+          <p:nvPr/>
+        </p:nvSpPr>
+        <p:spPr>
+          <a:xfrm>
+            <a:off x="8085534" y="2718792"/>
+            <a:ext cx="79394" cy="162818"/>
+          </a:xfrm>
+          <a:prstGeom prst="rect">
+            <a:avLst/>
+          </a:prstGeom>
+          <a:noFill/>
+          <a:ln/>
+        </p:spPr>
+        <p:txBody>
+          <a:bodyPr wrap="square" lIns="0" tIns="0" rIns="0" bIns="0" rtlCol="0" anchor="t"/>
+          <a:lstStyle/>
+          <a:p>
             <a:pPr algn="l" indent="0" marL="0">
               <a:lnSpc>
                 <a:spcPts val="1283"/>
@@ -21405,14 +21215,39 @@
             <a:r>
               <a:rPr lang="en-US" sz="950" b="1" dirty="0">
                 <a:solidFill>
-                  <a:srgbClr val="1A2535"/>
-                </a:solidFill>
-                <a:latin typeface="Noto Sans SC" pitchFamily="34" charset="0"/>
-                <a:ea typeface="Noto Sans SC" pitchFamily="34" charset="-122"/>
-                <a:cs typeface="Noto Sans SC" pitchFamily="34" charset="-120"/>
-              </a:rPr>
-              <a:t>1 min</a:t>
-            </a:r>
+                  <a:srgbClr val="4E5C6E"/>
+                </a:solidFill>
+                <a:latin typeface="Noto Sans SC" pitchFamily="34" charset="0"/>
+                <a:ea typeface="Noto Sans SC" pitchFamily="34" charset="-122"/>
+                <a:cs typeface="Noto Sans SC" pitchFamily="34" charset="-120"/>
+              </a:rPr>
+              <a:t>4</a:t>
+            </a:r>
+            <a:endParaRPr lang="en-US" sz="950" dirty="0"/>
+          </a:p>
+        </p:txBody>
+      </p:sp>
+      <p:sp>
+        <p:nvSpPr>
+          <p:cNvPr id="47" name="Text 45"/>
+          <p:cNvSpPr/>
+          <p:nvPr/>
+        </p:nvSpPr>
+        <p:spPr>
+          <a:xfrm>
+            <a:off x="8289578" y="2698700"/>
+            <a:ext cx="3297198" cy="325636"/>
+          </a:xfrm>
+          <a:prstGeom prst="rect">
+            <a:avLst/>
+          </a:prstGeom>
+          <a:noFill/>
+          <a:ln/>
+        </p:spPr>
+        <p:txBody>
+          <a:bodyPr wrap="square" lIns="0" tIns="0" rIns="0" bIns="0" rtlCol="0" anchor="t"/>
+          <a:lstStyle/>
+          <a:p>
             <a:pPr algn="l" indent="0" marL="0">
               <a:lnSpc>
                 <a:spcPts val="1283"/>
@@ -21428,113 +21263,30 @@
                 <a:ea typeface="Noto Sans SC" pitchFamily="34" charset="-122"/>
                 <a:cs typeface="Noto Sans SC" pitchFamily="34" charset="-120"/>
               </a:rPr>
-              <a:t> → grid hidden</a:t>
-            </a:r>
-            <a:endParaRPr lang="en-US" sz="950" dirty="0"/>
-          </a:p>
-        </p:txBody>
-      </p:sp>
-      <p:sp>
-        <p:nvSpPr>
-          <p:cNvPr id="42" name="Text 40"/>
-          <p:cNvSpPr/>
-          <p:nvPr/>
-        </p:nvSpPr>
-        <p:spPr>
-          <a:xfrm>
-            <a:off x="8035677" y="2334964"/>
-            <a:ext cx="177701" cy="177701"/>
-          </a:xfrm>
-          <a:prstGeom prst="roundRect">
-            <a:avLst>
-              <a:gd name="adj" fmla="val 514572"/>
-            </a:avLst>
-          </a:prstGeom>
-          <a:solidFill>
-            <a:srgbClr val="C96A5C"/>
-          </a:solidFill>
-          <a:ln/>
-        </p:spPr>
-        <p:txBody>
-          <a:bodyPr wrap="square" rtlCol="0" anchor="ctr"/>
-          <a:lstStyle/>
-          <a:p>
-            <a:pPr indent="0" marL="0">
-              <a:buNone/>
-            </a:pPr>
-            <a:endParaRPr lang="en-US" dirty="0"/>
-          </a:p>
-        </p:txBody>
-      </p:sp>
-      <p:sp>
-        <p:nvSpPr>
-          <p:cNvPr id="43" name="Text 41"/>
-          <p:cNvSpPr/>
-          <p:nvPr/>
-        </p:nvSpPr>
-        <p:spPr>
-          <a:xfrm>
-            <a:off x="8085981" y="2342406"/>
-            <a:ext cx="78635" cy="162818"/>
-          </a:xfrm>
-          <a:prstGeom prst="rect">
-            <a:avLst/>
-          </a:prstGeom>
-          <a:noFill/>
-          <a:ln/>
-        </p:spPr>
-        <p:txBody>
-          <a:bodyPr wrap="square" lIns="0" tIns="0" rIns="0" bIns="0" rtlCol="0" anchor="t"/>
-          <a:lstStyle/>
-          <a:p>
-            <a:pPr algn="l" indent="0" marL="0">
-              <a:lnSpc>
-                <a:spcPts val="1283"/>
-              </a:lnSpc>
-              <a:buNone/>
-            </a:pPr>
+              <a:t>Teams read list aloud — </a:t>
+            </a:r>
             <a:r>
               <a:rPr lang="en-US" sz="950" b="1" dirty="0">
                 <a:solidFill>
+                  <a:srgbClr val="1A2535"/>
+                </a:solidFill>
+                <a:latin typeface="Noto Sans SC" pitchFamily="34" charset="0"/>
+                <a:ea typeface="Noto Sans SC" pitchFamily="34" charset="-122"/>
+                <a:cs typeface="Noto Sans SC" pitchFamily="34" charset="-120"/>
+              </a:rPr>
+              <a:t>1 pt</a:t>
+            </a:r>
+            <a:r>
+              <a:rPr lang="en-US" sz="950" dirty="0">
+                <a:solidFill>
                   <a:srgbClr val="4E5C6E"/>
                 </a:solidFill>
                 <a:latin typeface="Noto Sans SC" pitchFamily="34" charset="0"/>
                 <a:ea typeface="Noto Sans SC" pitchFamily="34" charset="-122"/>
                 <a:cs typeface="Noto Sans SC" pitchFamily="34" charset="-120"/>
               </a:rPr>
-              <a:t>3</a:t>
-            </a:r>
-            <a:endParaRPr lang="en-US" sz="950" dirty="0"/>
-          </a:p>
-        </p:txBody>
-      </p:sp>
-      <p:sp>
-        <p:nvSpPr>
-          <p:cNvPr id="44" name="Text 42"/>
-          <p:cNvSpPr/>
-          <p:nvPr/>
-        </p:nvSpPr>
-        <p:spPr>
-          <a:xfrm>
-            <a:off x="8289578" y="2322314"/>
-            <a:ext cx="3297198" cy="325636"/>
-          </a:xfrm>
-          <a:prstGeom prst="rect">
-            <a:avLst/>
-          </a:prstGeom>
-          <a:noFill/>
-          <a:ln/>
-        </p:spPr>
-        <p:txBody>
-          <a:bodyPr wrap="square" lIns="0" tIns="0" rIns="0" bIns="0" rtlCol="0" anchor="t"/>
-          <a:lstStyle/>
-          <a:p>
-            <a:pPr algn="l" indent="0" marL="0">
-              <a:lnSpc>
-                <a:spcPts val="1283"/>
-              </a:lnSpc>
-              <a:buNone/>
-            </a:pPr>
+              <a:t> per correct radical + </a:t>
+            </a:r>
             <a:r>
               <a:rPr lang="en-US" sz="950" b="1" dirty="0">
                 <a:solidFill>
@@ -21544,198 +21296,8 @@
                 <a:ea typeface="Noto Sans SC" pitchFamily="34" charset="-122"/>
                 <a:cs typeface="Noto Sans SC" pitchFamily="34" charset="-120"/>
               </a:rPr>
-              <a:t>3 min</a:t>
-            </a:r>
-            <a:pPr algn="l" indent="0" marL="0">
-              <a:lnSpc>
-                <a:spcPts val="1283"/>
-              </a:lnSpc>
-              <a:buNone/>
-            </a:pPr>
-            <a:r>
-              <a:rPr lang="en-US" sz="950" dirty="0">
-                <a:solidFill>
-                  <a:srgbClr val="4E5C6E"/>
-                </a:solidFill>
-                <a:latin typeface="Noto Sans SC" pitchFamily="34" charset="0"/>
-                <a:ea typeface="Noto Sans SC" pitchFamily="34" charset="-122"/>
-                <a:cs typeface="Noto Sans SC" pitchFamily="34" charset="-120"/>
-              </a:rPr>
-              <a:t>: write as many radicals as remembered, each with one example word</a:t>
-            </a:r>
-            <a:endParaRPr lang="en-US" sz="950" dirty="0"/>
-          </a:p>
-        </p:txBody>
-      </p:sp>
-      <p:sp>
-        <p:nvSpPr>
-          <p:cNvPr id="45" name="Text 43"/>
-          <p:cNvSpPr/>
-          <p:nvPr/>
-        </p:nvSpPr>
-        <p:spPr>
-          <a:xfrm>
-            <a:off x="8035677" y="2711351"/>
-            <a:ext cx="177701" cy="177701"/>
-          </a:xfrm>
-          <a:prstGeom prst="roundRect">
-            <a:avLst>
-              <a:gd name="adj" fmla="val 514572"/>
-            </a:avLst>
-          </a:prstGeom>
-          <a:solidFill>
-            <a:srgbClr val="C96A5C"/>
-          </a:solidFill>
-          <a:ln/>
-        </p:spPr>
-        <p:txBody>
-          <a:bodyPr wrap="square" rtlCol="0" anchor="ctr"/>
-          <a:lstStyle/>
-          <a:p>
-            <a:pPr indent="0" marL="0">
-              <a:buNone/>
-            </a:pPr>
-            <a:endParaRPr lang="en-US" dirty="0"/>
-          </a:p>
-        </p:txBody>
-      </p:sp>
-      <p:sp>
-        <p:nvSpPr>
-          <p:cNvPr id="46" name="Text 44"/>
-          <p:cNvSpPr/>
-          <p:nvPr/>
-        </p:nvSpPr>
-        <p:spPr>
-          <a:xfrm>
-            <a:off x="8085534" y="2718792"/>
-            <a:ext cx="79394" cy="162818"/>
-          </a:xfrm>
-          <a:prstGeom prst="rect">
-            <a:avLst/>
-          </a:prstGeom>
-          <a:noFill/>
-          <a:ln/>
-        </p:spPr>
-        <p:txBody>
-          <a:bodyPr wrap="square" lIns="0" tIns="0" rIns="0" bIns="0" rtlCol="0" anchor="t"/>
-          <a:lstStyle/>
-          <a:p>
-            <a:pPr algn="l" indent="0" marL="0">
-              <a:lnSpc>
-                <a:spcPts val="1283"/>
-              </a:lnSpc>
-              <a:buNone/>
-            </a:pPr>
-            <a:r>
-              <a:rPr lang="en-US" sz="950" b="1" dirty="0">
-                <a:solidFill>
-                  <a:srgbClr val="4E5C6E"/>
-                </a:solidFill>
-                <a:latin typeface="Noto Sans SC" pitchFamily="34" charset="0"/>
-                <a:ea typeface="Noto Sans SC" pitchFamily="34" charset="-122"/>
-                <a:cs typeface="Noto Sans SC" pitchFamily="34" charset="-120"/>
-              </a:rPr>
-              <a:t>4</a:t>
-            </a:r>
-            <a:endParaRPr lang="en-US" sz="950" dirty="0"/>
-          </a:p>
-        </p:txBody>
-      </p:sp>
-      <p:sp>
-        <p:nvSpPr>
-          <p:cNvPr id="47" name="Text 45"/>
-          <p:cNvSpPr/>
-          <p:nvPr/>
-        </p:nvSpPr>
-        <p:spPr>
-          <a:xfrm>
-            <a:off x="8289578" y="2698700"/>
-            <a:ext cx="3297198" cy="325636"/>
-          </a:xfrm>
-          <a:prstGeom prst="rect">
-            <a:avLst/>
-          </a:prstGeom>
-          <a:noFill/>
-          <a:ln/>
-        </p:spPr>
-        <p:txBody>
-          <a:bodyPr wrap="square" lIns="0" tIns="0" rIns="0" bIns="0" rtlCol="0" anchor="t"/>
-          <a:lstStyle/>
-          <a:p>
-            <a:pPr algn="l" indent="0" marL="0">
-              <a:lnSpc>
-                <a:spcPts val="1283"/>
-              </a:lnSpc>
-              <a:buNone/>
-            </a:pPr>
-            <a:r>
-              <a:rPr lang="en-US" sz="950" dirty="0">
-                <a:solidFill>
-                  <a:srgbClr val="4E5C6E"/>
-                </a:solidFill>
-                <a:latin typeface="Noto Sans SC" pitchFamily="34" charset="0"/>
-                <a:ea typeface="Noto Sans SC" pitchFamily="34" charset="-122"/>
-                <a:cs typeface="Noto Sans SC" pitchFamily="34" charset="-120"/>
-              </a:rPr>
-              <a:t>Teams read list aloud — </a:t>
-            </a:r>
-            <a:pPr algn="l" indent="0" marL="0">
-              <a:lnSpc>
-                <a:spcPts val="1283"/>
-              </a:lnSpc>
-              <a:buNone/>
-            </a:pPr>
-            <a:r>
-              <a:rPr lang="en-US" sz="950" b="1" dirty="0">
-                <a:solidFill>
-                  <a:srgbClr val="1A2535"/>
-                </a:solidFill>
-                <a:latin typeface="Noto Sans SC" pitchFamily="34" charset="0"/>
-                <a:ea typeface="Noto Sans SC" pitchFamily="34" charset="-122"/>
-                <a:cs typeface="Noto Sans SC" pitchFamily="34" charset="-120"/>
-              </a:rPr>
-              <a:t>1 pt</a:t>
-            </a:r>
-            <a:pPr algn="l" indent="0" marL="0">
-              <a:lnSpc>
-                <a:spcPts val="1283"/>
-              </a:lnSpc>
-              <a:buNone/>
-            </a:pPr>
-            <a:r>
-              <a:rPr lang="en-US" sz="950" dirty="0">
-                <a:solidFill>
-                  <a:srgbClr val="4E5C6E"/>
-                </a:solidFill>
-                <a:latin typeface="Noto Sans SC" pitchFamily="34" charset="0"/>
-                <a:ea typeface="Noto Sans SC" pitchFamily="34" charset="-122"/>
-                <a:cs typeface="Noto Sans SC" pitchFamily="34" charset="-120"/>
-              </a:rPr>
-              <a:t> per correct radical + </a:t>
-            </a:r>
-            <a:pPr algn="l" indent="0" marL="0">
-              <a:lnSpc>
-                <a:spcPts val="1283"/>
-              </a:lnSpc>
-              <a:buNone/>
-            </a:pPr>
-            <a:r>
-              <a:rPr lang="en-US" sz="950" b="1" dirty="0">
-                <a:solidFill>
-                  <a:srgbClr val="1A2535"/>
-                </a:solidFill>
-                <a:latin typeface="Noto Sans SC" pitchFamily="34" charset="0"/>
-                <a:ea typeface="Noto Sans SC" pitchFamily="34" charset="-122"/>
-                <a:cs typeface="Noto Sans SC" pitchFamily="34" charset="-120"/>
-              </a:rPr>
               <a:t>1 bonus pt</a:t>
             </a:r>
-            <a:pPr algn="l" indent="0" marL="0">
-              <a:lnSpc>
-                <a:spcPts val="1283"/>
-              </a:lnSpc>
-              <a:buNone/>
-            </a:pPr>
             <a:r>
               <a:rPr lang="en-US" sz="950" dirty="0">
                 <a:solidFill>
@@ -21867,12 +21429,6 @@
               </a:rPr>
               <a:t>Every team member must contribute at least </a:t>
             </a:r>
-            <a:pPr algn="l" indent="0" marL="0">
-              <a:lnSpc>
-                <a:spcPts val="1330"/>
-              </a:lnSpc>
-              <a:buNone/>
-            </a:pPr>
             <a:r>
               <a:rPr lang="en-US" sz="950" b="1" dirty="0">
                 <a:solidFill>
@@ -21884,12 +21440,6 @@
               </a:rPr>
               <a:t>one radical</a:t>
             </a:r>
-            <a:pPr algn="l" indent="0" marL="0">
-              <a:lnSpc>
-                <a:spcPts val="1330"/>
-              </a:lnSpc>
-              <a:buNone/>
-            </a:pPr>
             <a:r>
               <a:rPr lang="en-US" sz="950" dirty="0">
                 <a:solidFill>
@@ -22021,12 +21571,6 @@
               </a:rPr>
               <a:t>Teams may keep the </a:t>
             </a:r>
-            <a:pPr algn="l" indent="0" marL="0">
-              <a:lnSpc>
-                <a:spcPts val="1330"/>
-              </a:lnSpc>
-              <a:buNone/>
-            </a:pPr>
             <a:r>
               <a:rPr lang="en-US" sz="950" b="1" dirty="0">
                 <a:solidFill>
@@ -22038,12 +21582,6 @@
               </a:rPr>
               <a:t>meaning column</a:t>
             </a:r>
-            <a:pPr algn="l" indent="0" marL="0">
-              <a:lnSpc>
-                <a:spcPts val="1330"/>
-              </a:lnSpc>
-              <a:buNone/>
-            </a:pPr>
             <a:r>
               <a:rPr lang="en-US" sz="950" dirty="0">
                 <a:solidFill>
@@ -22175,12 +21713,6 @@
               </a:rPr>
               <a:t>Bonus point for any radical </a:t>
             </a:r>
-            <a:pPr algn="l" indent="0" marL="0">
-              <a:lnSpc>
-                <a:spcPts val="1330"/>
-              </a:lnSpc>
-              <a:buNone/>
-            </a:pPr>
             <a:r>
               <a:rPr lang="en-US" sz="950" b="1" dirty="0">
                 <a:solidFill>
@@ -22192,12 +21724,6 @@
               </a:rPr>
               <a:t>beyond the twelve</a:t>
             </a:r>
-            <a:pPr algn="l" indent="0" marL="0">
-              <a:lnSpc>
-                <a:spcPts val="1330"/>
-              </a:lnSpc>
-              <a:buNone/>
-            </a:pPr>
             <a:r>
               <a:rPr lang="en-US" sz="950" dirty="0">
                 <a:solidFill>
@@ -23898,12 +23424,6 @@
               </a:rPr>
               <a:t>+ 土 纟 宀 钅</a:t>
             </a:r>
-            <a:pPr algn="l" indent="0" marL="0">
-              <a:lnSpc>
-                <a:spcPts val="1800"/>
-              </a:lnSpc>
-              <a:buNone/>
-            </a:pPr>
             <a:r>
               <a:rPr lang="en-US" sz="1200" dirty="0">
                 <a:solidFill>
@@ -23915,12 +23435,6 @@
               </a:rPr>
               <a:t> also count for full marks (see the I Do reference grid). </a:t>
             </a:r>
-            <a:pPr algn="l" indent="0" marL="0">
-              <a:lnSpc>
-                <a:spcPts val="1800"/>
-              </a:lnSpc>
-              <a:buNone/>
-            </a:pPr>
             <a:r>
               <a:rPr lang="en-US" sz="1200" b="1" dirty="0">
                 <a:solidFill>
@@ -23932,12 +23446,6 @@
               </a:rPr>
               <a:t>Extension:</a:t>
             </a:r>
-            <a:pPr algn="l" indent="0" marL="0">
-              <a:lnSpc>
-                <a:spcPts val="1800"/>
-              </a:lnSpc>
-              <a:buNone/>
-            </a:pPr>
             <a:r>
               <a:rPr lang="en-US" sz="1200" dirty="0">
                 <a:solidFill>
